--- a/ارائه-فصل-اول-تا-سوم-بیات.pptx
+++ b/ارائه-فصل-اول-تا-سوم-بیات.pptx
@@ -21888,16 +21888,16 @@
         </p:nvSpPr>
         <p:spPr>
           <a:xfrm>
-            <a:off x="804672" y="2084832"/>
-            <a:ext cx="4828032" cy="301752"/>
+            <a:off x="804672" y="2066544"/>
+            <a:ext cx="4828032" cy="306324"/>
           </a:xfrm>
           <a:prstGeom prst="roundRect">
             <a:avLst>
-              <a:gd name="adj" fmla="val 14000"/>
+              <a:gd name="adj" fmla="val 16000"/>
             </a:avLst>
           </a:prstGeom>
           <a:solidFill>
-            <a:srgbClr val="F4F8FB"/>
+            <a:srgbClr val="EAF3F8"/>
           </a:solidFill>
           <a:ln>
             <a:noFill/>
@@ -21934,7 +21934,7 @@
         </p:nvSpPr>
         <p:spPr>
           <a:xfrm>
-            <a:off x="960120" y="2125980"/>
+            <a:off x="960120" y="2112264"/>
             <a:ext cx="4480560" cy="228600"/>
           </a:xfrm>
           <a:prstGeom prst="rect">
@@ -21992,12 +21992,12 @@
         </p:nvSpPr>
         <p:spPr>
           <a:xfrm>
-            <a:off x="804672" y="2423160"/>
-            <a:ext cx="4828032" cy="301752"/>
+            <a:off x="804672" y="2409444"/>
+            <a:ext cx="4828032" cy="306324"/>
           </a:xfrm>
           <a:prstGeom prst="roundRect">
             <a:avLst>
-              <a:gd name="adj" fmla="val 14000"/>
+              <a:gd name="adj" fmla="val 16000"/>
             </a:avLst>
           </a:prstGeom>
           <a:solidFill>
@@ -22038,7 +22038,7 @@
         </p:nvSpPr>
         <p:spPr>
           <a:xfrm>
-            <a:off x="960120" y="2464308"/>
+            <a:off x="960120" y="2455164"/>
             <a:ext cx="4480560" cy="228600"/>
           </a:xfrm>
           <a:prstGeom prst="rect">
@@ -22096,16 +22096,16 @@
         </p:nvSpPr>
         <p:spPr>
           <a:xfrm>
-            <a:off x="804672" y="2761488"/>
-            <a:ext cx="4828032" cy="301752"/>
+            <a:off x="804672" y="2752344"/>
+            <a:ext cx="4828032" cy="306324"/>
           </a:xfrm>
           <a:prstGeom prst="roundRect">
             <a:avLst>
-              <a:gd name="adj" fmla="val 14000"/>
+              <a:gd name="adj" fmla="val 16000"/>
             </a:avLst>
           </a:prstGeom>
           <a:solidFill>
-            <a:srgbClr val="F4F8FB"/>
+            <a:srgbClr val="EAF3F8"/>
           </a:solidFill>
           <a:ln>
             <a:noFill/>
@@ -22142,7 +22142,7 @@
         </p:nvSpPr>
         <p:spPr>
           <a:xfrm>
-            <a:off x="960120" y="2802636"/>
+            <a:off x="960120" y="2798064"/>
             <a:ext cx="4480560" cy="228600"/>
           </a:xfrm>
           <a:prstGeom prst="rect">
@@ -22200,12 +22200,12 @@
         </p:nvSpPr>
         <p:spPr>
           <a:xfrm>
-            <a:off x="804672" y="3099816"/>
-            <a:ext cx="4828032" cy="301752"/>
+            <a:off x="804672" y="3095244"/>
+            <a:ext cx="4828032" cy="306324"/>
           </a:xfrm>
           <a:prstGeom prst="roundRect">
             <a:avLst>
-              <a:gd name="adj" fmla="val 14000"/>
+              <a:gd name="adj" fmla="val 16000"/>
             </a:avLst>
           </a:prstGeom>
           <a:solidFill>
@@ -22305,15 +22305,15 @@
         <p:spPr>
           <a:xfrm>
             <a:off x="804672" y="3438144"/>
-            <a:ext cx="4828032" cy="301752"/>
+            <a:ext cx="4828032" cy="306324"/>
           </a:xfrm>
           <a:prstGeom prst="roundRect">
             <a:avLst>
-              <a:gd name="adj" fmla="val 14000"/>
+              <a:gd name="adj" fmla="val 16000"/>
             </a:avLst>
           </a:prstGeom>
           <a:solidFill>
-            <a:srgbClr val="F4F8FB"/>
+            <a:srgbClr val="EAF3F8"/>
           </a:solidFill>
           <a:ln>
             <a:noFill/>
@@ -22350,7 +22350,7 @@
         </p:nvSpPr>
         <p:spPr>
           <a:xfrm>
-            <a:off x="960120" y="3479292"/>
+            <a:off x="960120" y="3483864"/>
             <a:ext cx="4480560" cy="228600"/>
           </a:xfrm>
           <a:prstGeom prst="rect">
